--- a/MECH191_metallurgy/slideDecks/pptx/MECH191_Week2_Lecture.pptx
+++ b/MECH191_metallurgy/slideDecks/pptx/MECH191_Week2_Lecture.pptx
@@ -19305,7 +19305,7 @@
         </p:spPr>
         <p:txBody>
           <a:bodyPr wrap="none" lIns="0" rIns="0" tIns="0" bIns="0">
-            <a:spAutoFit/>
+            <a:noAutofit/>
           </a:bodyPr>
           <a:lstStyle/>
           <a:p>
@@ -19316,7 +19316,7 @@
                 </a:solidFill>
                 <a:latin typeface="Calibri"/>
               </a:rPr>
-              <a:t>Metallography Lab — Module 2</a:t>
+              <a:t>Alloy Research Portfolio — Module 2</a:t>
             </a:r>
           </a:p>
         </p:txBody>
@@ -19339,7 +19339,7 @@
         </p:spPr>
         <p:txBody>
           <a:bodyPr wrap="none" lIns="0" rIns="0" tIns="0" bIns="0">
-            <a:spAutoFit/>
+            <a:noAutofit/>
           </a:bodyPr>
           <a:lstStyle/>
           <a:p>
@@ -19350,7 +19350,7 @@
                 </a:solidFill>
                 <a:latin typeface="Calibri"/>
               </a:rPr>
-              <a:t>EXAMET-5-R-600-HD  ·  50–500×</a:t>
+              <a:t>No Microscope Required</a:t>
             </a:r>
           </a:p>
         </p:txBody>
@@ -19475,7 +19475,7 @@
         </p:spPr>
         <p:txBody>
           <a:bodyPr wrap="none" lIns="0" rIns="0" tIns="0" bIns="0">
-            <a:spAutoFit/>
+            <a:noAutofit/>
           </a:bodyPr>
           <a:lstStyle/>
           <a:p>
@@ -19486,7 +19486,7 @@
                 </a:solidFill>
                 <a:latin typeface="Calibri"/>
               </a:rPr>
-              <a:t>Compare pearlite fraction in A vs B. Measure the Vickers indent </a:t>
+              <a:t>Research 1018 vs. 1045 steel: composition, published hardness, and</a:t>
             </a:r>
           </a:p>
         </p:txBody>
@@ -19509,7 +19509,7 @@
         </p:spPr>
         <p:txBody>
           <a:bodyPr wrap="none" lIns="0" rIns="0" tIns="0" bIns="0">
-            <a:spAutoFit/>
+            <a:noAutofit/>
           </a:bodyPr>
           <a:lstStyle/>
           <a:p>
@@ -19520,7 +19520,7 @@
                 </a:solidFill>
                 <a:latin typeface="Calibri"/>
               </a:rPr>
-              <a:t>diagonal (now on B) and calculate HV.</a:t>
+              <a:t>expected pearlite content — then apply the Vickers HV formula.</a:t>
             </a:r>
           </a:p>
         </p:txBody>
@@ -19577,7 +19577,7 @@
         </p:spPr>
         <p:txBody>
           <a:bodyPr wrap="none" lIns="0" rIns="0" tIns="0" bIns="0">
-            <a:spAutoFit/>
+            <a:noAutofit/>
           </a:bodyPr>
           <a:lstStyle/>
           <a:p>
@@ -19588,7 +19588,7 @@
                 </a:solidFill>
                 <a:latin typeface="Calibri"/>
               </a:rPr>
-              <a:t>1  Observe — complete feature table</a:t>
+              <a:t>1  Research — record data &amp; sources</a:t>
             </a:r>
           </a:p>
         </p:txBody>
@@ -19611,7 +19611,7 @@
         </p:spPr>
         <p:txBody>
           <a:bodyPr wrap="none" lIns="0" rIns="0" tIns="0" bIns="0">
-            <a:spAutoFit/>
+            <a:noAutofit/>
           </a:bodyPr>
           <a:lstStyle/>
           <a:p>
@@ -19622,7 +19622,7 @@
                 </a:solidFill>
                 <a:latin typeface="Calibri"/>
               </a:rPr>
-              <a:t>2  Sketch — label magnification &amp; specimen</a:t>
+              <a:t>2  Answer — short-answer questions</a:t>
             </a:r>
           </a:p>
         </p:txBody>
@@ -19645,7 +19645,7 @@
         </p:spPr>
         <p:txBody>
           <a:bodyPr wrap="none" lIns="0" rIns="0" tIns="0" bIns="0">
-            <a:spAutoFit/>
+            <a:noAutofit/>
           </a:bodyPr>
           <a:lstStyle/>
           <a:p>
@@ -19656,7 +19656,7 @@
                 </a:solidFill>
                 <a:latin typeface="Calibri"/>
               </a:rPr>
-              <a:t>3  Answer — 4 short questions</a:t>
+              <a:t>3  Apply — critical-thinking &amp; equations</a:t>
             </a:r>
           </a:p>
         </p:txBody>
@@ -19679,7 +19679,7 @@
         </p:spPr>
         <p:txBody>
           <a:bodyPr wrap="none" lIns="0" rIns="0" tIns="0" bIns="0">
-            <a:spAutoFit/>
+            <a:noAutofit/>
           </a:bodyPr>
           <a:lstStyle/>
           <a:p>
@@ -19690,7 +19690,7 @@
                 </a:solidFill>
                 <a:latin typeface="Calibri"/>
               </a:rPr>
-              <a:t>Specimens to Check Out</a:t>
+              <a:t>Alloys of Record</a:t>
             </a:r>
           </a:p>
         </p:txBody>
@@ -19713,7 +19713,7 @@
         </p:spPr>
         <p:txBody>
           <a:bodyPr wrap="none" lIns="0" rIns="0" tIns="0" bIns="0">
-            <a:spAutoFit/>
+            <a:noAutofit/>
           </a:bodyPr>
           <a:lstStyle/>
           <a:p>
@@ -19724,7 +19724,7 @@
                 </a:solidFill>
                 <a:latin typeface="Calibri"/>
               </a:rPr>
-              <a:t>· Specimen A — 1018 steel</a:t>
+              <a:t>· Alloy A — 1018 steel (normalized)</a:t>
             </a:r>
           </a:p>
         </p:txBody>
@@ -19747,7 +19747,7 @@
         </p:spPr>
         <p:txBody>
           <a:bodyPr wrap="none" lIns="0" rIns="0" tIns="0" bIns="0">
-            <a:spAutoFit/>
+            <a:noAutofit/>
           </a:bodyPr>
           <a:lstStyle/>
           <a:p>
@@ -19758,7 +19758,7 @@
                 </a:solidFill>
                 <a:latin typeface="Calibri"/>
               </a:rPr>
-              <a:t>· Specimen B — 1045 steel (Vickers indent applied)</a:t>
+              <a:t>· Alloy B — 1045 steel (normalized)</a:t>
             </a:r>
           </a:p>
         </p:txBody>
@@ -19781,7 +19781,7 @@
         </p:spPr>
         <p:txBody>
           <a:bodyPr wrap="none" lIns="0" rIns="0" tIns="0" bIns="0">
-            <a:spAutoFit/>
+            <a:noAutofit/>
           </a:bodyPr>
           <a:lstStyle/>
           <a:p>
@@ -19792,7 +19792,7 @@
                 </a:solidFill>
                 <a:latin typeface="Calibri"/>
               </a:rPr>
-              <a:t>How to check out the kit:</a:t>
+              <a:t>How to Complete This Module:</a:t>
             </a:r>
           </a:p>
         </p:txBody>
@@ -19815,7 +19815,7 @@
         </p:spPr>
         <p:txBody>
           <a:bodyPr wrap="none" lIns="0" rIns="0" tIns="0" bIns="0">
-            <a:spAutoFit/>
+            <a:noAutofit/>
           </a:bodyPr>
           <a:lstStyle/>
           <a:p>
@@ -19826,7 +19826,7 @@
                 </a:solidFill>
                 <a:latin typeface="Calibri"/>
               </a:rPr>
-              <a:t>1  See instructor after class today</a:t>
+              <a:t>1  Research the alloy(s) using credible sources</a:t>
             </a:r>
           </a:p>
         </p:txBody>
@@ -19849,7 +19849,7 @@
         </p:spPr>
         <p:txBody>
           <a:bodyPr wrap="none" lIns="0" rIns="0" tIns="0" bIns="0">
-            <a:spAutoFit/>
+            <a:noAutofit/>
           </a:bodyPr>
           <a:lstStyle/>
           <a:p>
@@ -19860,7 +19860,7 @@
                 </a:solidFill>
                 <a:latin typeface="Calibri"/>
               </a:rPr>
-              <a:t>2  Sign out the specimen tray</a:t>
+              <a:t>2  Record data with a source citation</a:t>
             </a:r>
           </a:p>
         </p:txBody>
@@ -19883,7 +19883,7 @@
         </p:spPr>
         <p:txBody>
           <a:bodyPr wrap="none" lIns="0" rIns="0" tIns="0" bIns="0">
-            <a:spAutoFit/>
+            <a:noAutofit/>
           </a:bodyPr>
           <a:lstStyle/>
           <a:p>
@@ -19894,7 +19894,7 @@
                 </a:solidFill>
                 <a:latin typeface="Calibri"/>
               </a:rPr>
-              <a:t>3  Use the EXAMET-5 at your convenience</a:t>
+              <a:t>3  Answer the short-answer questions</a:t>
             </a:r>
           </a:p>
         </p:txBody>
@@ -19917,7 +19917,7 @@
         </p:spPr>
         <p:txBody>
           <a:bodyPr wrap="none" lIns="0" rIns="0" tIns="0" bIns="0">
-            <a:spAutoFit/>
+            <a:noAutofit/>
           </a:bodyPr>
           <a:lstStyle/>
           <a:p>
@@ -19928,7 +19928,7 @@
                 </a:solidFill>
                 <a:latin typeface="Calibri"/>
               </a:rPr>
-              <a:t>4  Return kit before leaving class</a:t>
+              <a:t>4  Answer the critical-thinking questions</a:t>
             </a:r>
           </a:p>
         </p:txBody>
@@ -19951,7 +19951,7 @@
         </p:spPr>
         <p:txBody>
           <a:bodyPr wrap="none" lIns="0" rIns="0" tIns="0" bIns="0">
-            <a:spAutoFit/>
+            <a:noAutofit/>
           </a:bodyPr>
           <a:lstStyle/>
           <a:p>
@@ -19962,7 +19962,7 @@
                 </a:solidFill>
                 <a:latin typeface="Calibri"/>
               </a:rPr>
-              <a:t>5  Submit completed module with your portfolio</a:t>
+              <a:t>5  Keep the module with your portfolio</a:t>
             </a:r>
           </a:p>
         </p:txBody>
